--- a/slides/12_Outliers_and_Predictions.pptx
+++ b/slides/12_Outliers_and_Predictions.pptx
@@ -131,7 +131,7 @@
   <p:extLst>
     <p:ext uri="{521415D9-36F7-43E2-AB2F-B90AF26B5E84}">
       <p14:sectionLst xmlns:p14="http://schemas.microsoft.com/office/powerpoint/2010/main">
-        <p14:section name="Introduction" id="{6d0c2c65-1927-196b-b3bc-db3da26ec3d0}">
+        <p14:section name="Introduction" id="{5f92945b-e413-995e-877a-bd10ecfb9221}">
           <p14:sldIdLst>
             <p14:sldId id="256"/>
             <p14:sldId id="257"/>
@@ -139,7 +139,7 @@
             <p14:sldId id="259"/>
           </p14:sldIdLst>
         </p14:section>
-        <p14:section name="Finding outliers" id="{2434cff5-6c40-58a4-9fdb-080a850a43a0}">
+        <p14:section name="Finding outliers" id="{6f3ef6c0-10d2-efea-f0bc-9a3abd63f8f2}">
           <p14:sldIdLst>
             <p14:sldId id="260"/>
             <p14:sldId id="261"/>
@@ -157,7 +157,7 @@
             <p14:sldId id="273"/>
           </p14:sldIdLst>
         </p14:section>
-        <p14:section name="Making a prediction" id="{d1482273-893d-e900-0bf9-1e20c8cb9ace}">
+        <p14:section name="Making a prediction" id="{6ae25d8c-1b36-1258-651b-b17610664144}">
           <p14:sldIdLst>
             <p14:sldId id="274"/>
             <p14:sldId id="275"/>
@@ -166,7 +166,7 @@
             <p14:sldId id="278"/>
           </p14:sldIdLst>
         </p14:section>
-        <p14:section name="Wrap up" id="{156beebf-4228-f08c-938f-575c48e1725f}">
+        <p14:section name="Wrap up" id="{ceefe179-6206-b00e-9f9d-04f5a6042993}">
           <p14:sldIdLst>
             <p14:sldId id="279"/>
             <p14:sldId id="280"/>
@@ -3933,7 +3933,7 @@
               <a:t> </a:t>
             </a:r>
             <a:r>
-              <a:rPr lang="en-US" sz="1300" dirty="0">
+              <a:rPr lang="en-US" sz="1300" b="1" dirty="0">
                 <a:solidFill>
                   <a:srgbClr val="B86E1E"/>
                 </a:solidFill>
@@ -3952,7 +3952,7 @@
               <a:t> finds the value a given fraction of the way along the sorted column: </a:t>
             </a:r>
             <a:r>
-              <a:rPr lang="en-US" sz="1300" dirty="0">
+              <a:rPr lang="en-US" sz="1300" b="1" dirty="0">
                 <a:solidFill>
                   <a:srgbClr val="B86E1E"/>
                 </a:solidFill>
@@ -3971,7 +3971,7 @@
               <a:t> for Q1 and </a:t>
             </a:r>
             <a:r>
-              <a:rPr lang="en-US" sz="1300" dirty="0">
+              <a:rPr lang="en-US" sz="1300" b="1" dirty="0">
                 <a:solidFill>
                   <a:srgbClr val="B86E1E"/>
                 </a:solidFill>
@@ -4024,7 +4024,7 @@
               <a:t> → </a:t>
             </a:r>
             <a:r>
-              <a:rPr lang="en-US" sz="1300" dirty="0">
+              <a:rPr lang="en-US" sz="1300" b="1" dirty="0">
                 <a:solidFill>
                   <a:srgbClr val="B86E1E"/>
                 </a:solidFill>
@@ -4043,7 +4043,7 @@
               <a:t> is the IQR, so </a:t>
             </a:r>
             <a:r>
-              <a:rPr lang="en-US" sz="1300" dirty="0">
+              <a:rPr lang="en-US" sz="1300" b="1" dirty="0">
                 <a:solidFill>
                   <a:srgbClr val="B86E1E"/>
                 </a:solidFill>
@@ -5280,7 +5280,7 @@
               <a:t>Change </a:t>
             </a:r>
             <a:r>
-              <a:rPr lang="en-US" sz="1800" dirty="0">
+              <a:rPr lang="en-US" sz="1800" b="1" dirty="0">
                 <a:solidFill>
                   <a:srgbClr val="B86E1E"/>
                 </a:solidFill>
@@ -5299,7 +5299,7 @@
               <a:t> to </a:t>
             </a:r>
             <a:r>
-              <a:rPr lang="en-US" sz="1800" dirty="0">
+              <a:rPr lang="en-US" sz="1800" b="1" dirty="0">
                 <a:solidFill>
                   <a:srgbClr val="B86E1E"/>
                 </a:solidFill>
@@ -6109,7 +6109,7 @@
               <a:t>When checking outliers, always look at the most extreme values first. If the most extreme value is believable, the less extreme ones almost certainly are too. If it isn't, we've found a mistake to fix in </a:t>
             </a:r>
             <a:r>
-              <a:rPr lang="en-US" sz="1800" dirty="0">
+              <a:rPr lang="en-US" sz="1800" b="1" dirty="0">
                 <a:solidFill>
                   <a:srgbClr val="B86E1E"/>
                 </a:solidFill>
@@ -6409,7 +6409,7 @@
               <a:t> We group the outliers by </a:t>
             </a:r>
             <a:r>
-              <a:rPr lang="en-US" sz="1300" dirty="0">
+              <a:rPr lang="en-US" sz="1300" b="1" dirty="0">
                 <a:solidFill>
                   <a:srgbClr val="B86E1E"/>
                 </a:solidFill>
@@ -7590,7 +7590,7 @@
               <a:t>From 2019 to 2024, the number of games in </a:t>
             </a:r>
             <a:r>
-              <a:rPr lang="en-US" sz="1600" dirty="0">
+              <a:rPr lang="en-US" sz="1600" b="1" dirty="0">
                 <a:solidFill>
                   <a:srgbClr val="E8A55A"/>
                 </a:solidFill>
@@ -8397,7 +8397,7 @@
               <a:t> → </a:t>
             </a:r>
             <a:r>
-              <a:rPr lang="en-US" sz="1300" dirty="0">
+              <a:rPr lang="en-US" sz="1300" b="1" dirty="0">
                 <a:solidFill>
                   <a:srgbClr val="B86E1E"/>
                 </a:solidFill>
@@ -8416,7 +8416,7 @@
               <a:t> finds the change from each year to the next, then </a:t>
             </a:r>
             <a:r>
-              <a:rPr lang="en-US" sz="1300" dirty="0">
+              <a:rPr lang="en-US" sz="1300" b="1" dirty="0">
                 <a:solidFill>
                   <a:srgbClr val="B86E1E"/>
                 </a:solidFill>
@@ -8469,7 +8469,7 @@
               <a:t> → adds the average change to the last count, using </a:t>
             </a:r>
             <a:r>
-              <a:rPr lang="en-US" sz="1300" dirty="0">
+              <a:rPr lang="en-US" sz="1300" b="1" dirty="0">
                 <a:solidFill>
                   <a:srgbClr val="B86E1E"/>
                 </a:solidFill>
@@ -9760,7 +9760,7 @@
               <a:t>Add any new limitations you've found to your list under </a:t>
             </a:r>
             <a:r>
-              <a:rPr lang="en-US" sz="1400" dirty="0">
+              <a:rPr lang="en-US" sz="1400" b="1" dirty="0">
                 <a:solidFill>
                   <a:srgbClr val="B86E1E"/>
                 </a:solidFill>
@@ -10449,7 +10449,7 @@
               <a:t>We'll look in </a:t>
             </a:r>
             <a:r>
-              <a:rPr lang="en-US" sz="1600" dirty="0">
+              <a:rPr lang="en-US" sz="1600" b="1" dirty="0">
                 <a:solidFill>
                   <a:srgbClr val="E8A55A"/>
                 </a:solidFill>
